--- a/server/Brand-Theme.pptx
+++ b/server/Brand-Theme.pptx
@@ -883,5 +883,5 @@
 </p:sld>
 </file>
 
-<file path=ppt/theme/theme1.xml><?xml version="1.0" encoding="UTF-8" standalone="yes"?><a:theme xmlns:a="http://schemas.openxmlformats.org/drawingml/2006/main" name="Office Theme"><a:themeElements><a:clrScheme name="Office"><a:dk1><a:sysClr val="windowText" lastClr="000000"/></a:dk1><a:lt1><a:sysClr val="window" lastClr="FFFFFF"/></a:lt1><a:dk2><a:srgbClr val="44546A"/></a:dk2><a:lt2><a:srgbClr val="E7E6E6"/></a:lt2><a:accent1><a:srgbClr val="FFFFFF"/></a:accent1></a:outerShdw></a:effectLst></a:effectStyle></a:effectStyleLst><a:bgFillStyleLst><a:solidFill><a:schemeClr val="phClr"/></a:solidFill><a:solidFill><a:schemeClr val="phClr"><a:tint val="95000"/><a:satMod val="170000"/></a:schemeClr></a:solidFill><a:gradFill rotWithShape="1"><a:gsLst><a:gs pos="0"><a:schemeClr val="phClr"><a:tint val="93000"/><a:satMod val="150000"/><a:shade val="98000"/><a:lumMod val="102000"/></a:schemeClr></a:gs><a:gs pos="50000"><a:schemeClr val="phClr"><a:tint val="98000"/><a:satMod val="130000"/><a:shade val="90000"/><a:lumMod val="103000"/></a:schemeClr></a:gs><a:gs pos="100000"><a:schemeClr val="phClr"><a:shade val="63000"/><a:satMod val="120000"/></a:schemeClr></a:gs></a:gsLst><a:lin ang="5400000" scaled="0"/></a:gradFill></a:bgFillStyleLst></a:fmtScheme></a:themeElements><a:objectDefaults/><a:extraClrSchemeLst/><a:extLst><a:ext uri="{05A4C25C-085E-4340-85A3-A5531E510DB2}"><thm15:themeFamily xmlns:thm15="http://schemas.microsoft.com/office/thememl/2012/main" name="Office Theme" id="{62F939B6-93AF-4DB8-9C6B-D6C7DFDC589F}" vid="{4A3C46E8-61CC-4603-A589-7422A47A8E4A}"/></a:ext></a:extLst></a:theme>
+<file path=ppt/theme/theme1.xml><?xml version="1.0" encoding="UTF-8" standalone="yes"?><a:theme xmlns:a="http://schemas.openxmlformats.org/drawingml/2006/main" name="Office Theme"><a:themeElements><a:clrScheme name="Office"><a:dk1><a:srgbClr val="0F1111"/></a:dk1></a:outerShdw></a:effectLst></a:effectStyle></a:effectStyleLst><a:bgFillStyleLst><a:solidFill><a:schemeClr val="phClr"/></a:solidFill><a:solidFill><a:schemeClr val="phClr"><a:tint val="95000"/><a:satMod val="170000"/></a:schemeClr></a:solidFill><a:gradFill rotWithShape="1"><a:gsLst><a:gs pos="0"><a:schemeClr val="phClr"><a:tint val="93000"/><a:satMod val="150000"/><a:shade val="98000"/><a:lumMod val="102000"/></a:schemeClr></a:gs><a:gs pos="50000"><a:schemeClr val="phClr"><a:tint val="98000"/><a:satMod val="130000"/><a:shade val="90000"/><a:lumMod val="103000"/></a:schemeClr></a:gs><a:gs pos="100000"><a:schemeClr val="phClr"><a:shade val="63000"/><a:satMod val="120000"/></a:schemeClr></a:gs></a:gsLst><a:lin ang="5400000" scaled="0"/></a:gradFill></a:bgFillStyleLst></a:fmtScheme></a:themeElements><a:objectDefaults/><a:extraClrSchemeLst/><a:extLst><a:ext uri="{05A4C25C-085E-4340-85A3-A5531E510DB2}"><thm15:themeFamily xmlns:thm15="http://schemas.microsoft.com/office/thememl/2012/main" name="Office Theme" id="{62F939B6-93AF-4DB8-9C6B-D6C7DFDC589F}" vid="{4A3C46E8-61CC-4603-A589-7422A47A8E4A}"/></a:ext></a:extLst></a:theme>
 </file>